--- a/Automatización_del_Análisis_de_Robos.pptx
+++ b/Automatización_del_Análisis_de_Robos.pptx
@@ -126,20 +126,12 @@
 </p:presentation>
 </file>
 
-<file path=ppt/revisionInfo.xml><?xml version="1.0" encoding="utf-8"?>
-<p1510:revInfo xmlns:a="http://schemas.openxmlformats.org/drawingml/2006/main" xmlns:r="http://schemas.openxmlformats.org/officeDocument/2006/relationships" xmlns:p1510="http://schemas.microsoft.com/office/powerpoint/2015/10/main">
-  <p1510:revLst>
-    <p1510:client id="{4AABE9BA-38CF-4F55-9E30-5EE7957DE134}" v="1" dt="2026-03-10T12:52:14.736"/>
-  </p1510:revLst>
-</p1510:revInfo>
-</file>
-
 <file path=ppt/changesInfos/changesInfo1.xml><?xml version="1.0" encoding="utf-8"?>
 <pc:chgInfo xmlns:a="http://schemas.openxmlformats.org/drawingml/2006/main" xmlns:r="http://schemas.openxmlformats.org/officeDocument/2006/relationships" xmlns:ac="http://schemas.microsoft.com/office/drawing/2013/main/command" xmlns:pc="http://schemas.microsoft.com/office/powerpoint/2013/main/command">
   <pc:docChgLst>
     <pc:chgData name="Matias Augusto Valenzuela Nuche" userId="a2561e33-87ca-49b8-bd0f-f82c3c00aa55" providerId="ADAL" clId="{ED73AF4C-0887-4100-98D5-0E5E34EDE498}"/>
-    <pc:docChg chg="modSld sldOrd">
-      <pc:chgData name="Matias Augusto Valenzuela Nuche" userId="a2561e33-87ca-49b8-bd0f-f82c3c00aa55" providerId="ADAL" clId="{ED73AF4C-0887-4100-98D5-0E5E34EDE498}" dt="2026-03-10T12:52:14.736" v="5"/>
+    <pc:docChg chg="custSel modSld sldOrd">
+      <pc:chgData name="Matias Augusto Valenzuela Nuche" userId="a2561e33-87ca-49b8-bd0f-f82c3c00aa55" providerId="ADAL" clId="{ED73AF4C-0887-4100-98D5-0E5E34EDE498}" dt="2026-04-07T16:15:36.942" v="7" actId="729"/>
       <pc:docMkLst>
         <pc:docMk/>
       </pc:docMkLst>
@@ -150,8 +142,8 @@
           <pc:sldMk cId="0" sldId="256"/>
         </pc:sldMkLst>
       </pc:sldChg>
-      <pc:sldChg chg="mod modShow">
-        <pc:chgData name="Matias Augusto Valenzuela Nuche" userId="a2561e33-87ca-49b8-bd0f-f82c3c00aa55" providerId="ADAL" clId="{ED73AF4C-0887-4100-98D5-0E5E34EDE498}" dt="2026-03-10T12:25:01.299" v="0" actId="729"/>
+      <pc:sldChg chg="mod modShow chgLayout">
+        <pc:chgData name="Matias Augusto Valenzuela Nuche" userId="a2561e33-87ca-49b8-bd0f-f82c3c00aa55" providerId="ADAL" clId="{ED73AF4C-0887-4100-98D5-0E5E34EDE498}" dt="2026-04-07T16:15:36.942" v="7" actId="729"/>
         <pc:sldMkLst>
           <pc:docMk/>
           <pc:sldMk cId="0" sldId="257"/>
@@ -356,7 +348,7 @@
             <a:fld id="{1D8BD707-D9CF-40AE-B4C6-C98DA3205C09}" type="datetimeFigureOut">
               <a:rPr lang="en-US" smtClean="0"/>
               <a:pPr/>
-              <a:t>3/10/2026</a:t>
+              <a:t>4/7/2026</a:t>
             </a:fld>
             <a:endParaRPr lang="en-US"/>
           </a:p>
@@ -521,7 +513,7 @@
             <a:fld id="{1D8BD707-D9CF-40AE-B4C6-C98DA3205C09}" type="datetimeFigureOut">
               <a:rPr lang="en-US" smtClean="0"/>
               <a:pPr/>
-              <a:t>3/10/2026</a:t>
+              <a:t>4/7/2026</a:t>
             </a:fld>
             <a:endParaRPr lang="en-US"/>
           </a:p>
@@ -696,7 +688,7 @@
             <a:fld id="{1D8BD707-D9CF-40AE-B4C6-C98DA3205C09}" type="datetimeFigureOut">
               <a:rPr lang="en-US" smtClean="0"/>
               <a:pPr/>
-              <a:t>3/10/2026</a:t>
+              <a:t>4/7/2026</a:t>
             </a:fld>
             <a:endParaRPr lang="en-US"/>
           </a:p>
@@ -861,7 +853,7 @@
             <a:fld id="{1D8BD707-D9CF-40AE-B4C6-C98DA3205C09}" type="datetimeFigureOut">
               <a:rPr lang="en-US" smtClean="0"/>
               <a:pPr/>
-              <a:t>3/10/2026</a:t>
+              <a:t>4/7/2026</a:t>
             </a:fld>
             <a:endParaRPr lang="en-US"/>
           </a:p>
@@ -1103,7 +1095,7 @@
             <a:fld id="{1D8BD707-D9CF-40AE-B4C6-C98DA3205C09}" type="datetimeFigureOut">
               <a:rPr lang="en-US" smtClean="0"/>
               <a:pPr/>
-              <a:t>3/10/2026</a:t>
+              <a:t>4/7/2026</a:t>
             </a:fld>
             <a:endParaRPr lang="en-US"/>
           </a:p>
@@ -1385,7 +1377,7 @@
             <a:fld id="{1D8BD707-D9CF-40AE-B4C6-C98DA3205C09}" type="datetimeFigureOut">
               <a:rPr lang="en-US" smtClean="0"/>
               <a:pPr/>
-              <a:t>3/10/2026</a:t>
+              <a:t>4/7/2026</a:t>
             </a:fld>
             <a:endParaRPr lang="en-US"/>
           </a:p>
@@ -1801,7 +1793,7 @@
             <a:fld id="{1D8BD707-D9CF-40AE-B4C6-C98DA3205C09}" type="datetimeFigureOut">
               <a:rPr lang="en-US" smtClean="0"/>
               <a:pPr/>
-              <a:t>3/10/2026</a:t>
+              <a:t>4/7/2026</a:t>
             </a:fld>
             <a:endParaRPr lang="en-US"/>
           </a:p>
@@ -1915,7 +1907,7 @@
             <a:fld id="{1D8BD707-D9CF-40AE-B4C6-C98DA3205C09}" type="datetimeFigureOut">
               <a:rPr lang="en-US" smtClean="0"/>
               <a:pPr/>
-              <a:t>3/10/2026</a:t>
+              <a:t>4/7/2026</a:t>
             </a:fld>
             <a:endParaRPr lang="en-US"/>
           </a:p>
@@ -2007,7 +1999,7 @@
             <a:fld id="{1D8BD707-D9CF-40AE-B4C6-C98DA3205C09}" type="datetimeFigureOut">
               <a:rPr lang="en-US" smtClean="0"/>
               <a:pPr/>
-              <a:t>3/10/2026</a:t>
+              <a:t>4/7/2026</a:t>
             </a:fld>
             <a:endParaRPr lang="en-US"/>
           </a:p>
@@ -2279,7 +2271,7 @@
             <a:fld id="{1D8BD707-D9CF-40AE-B4C6-C98DA3205C09}" type="datetimeFigureOut">
               <a:rPr lang="en-US" smtClean="0"/>
               <a:pPr/>
-              <a:t>3/10/2026</a:t>
+              <a:t>4/7/2026</a:t>
             </a:fld>
             <a:endParaRPr lang="en-US"/>
           </a:p>
@@ -2528,7 +2520,7 @@
             <a:fld id="{1D8BD707-D9CF-40AE-B4C6-C98DA3205C09}" type="datetimeFigureOut">
               <a:rPr lang="en-US" smtClean="0"/>
               <a:pPr/>
-              <a:t>3/10/2026</a:t>
+              <a:t>4/7/2026</a:t>
             </a:fld>
             <a:endParaRPr lang="en-US"/>
           </a:p>
@@ -2736,7 +2728,7 @@
             <a:fld id="{1D8BD707-D9CF-40AE-B4C6-C98DA3205C09}" type="datetimeFigureOut">
               <a:rPr lang="en-US" smtClean="0"/>
               <a:pPr/>
-              <a:t>3/10/2026</a:t>
+              <a:t>4/7/2026</a:t>
             </a:fld>
             <a:endParaRPr lang="en-US"/>
           </a:p>
@@ -3136,11 +3128,11 @@
   <p:clrMapOvr>
     <a:masterClrMapping/>
   </p:clrMapOvr>
-  <mc:AlternateContent xmlns:mc="http://schemas.openxmlformats.org/markup-compatibility/2006">
-    <mc:Choice xmlns:p14="http://schemas.microsoft.com/office/powerpoint/2010/main" Requires="p14">
+  <mc:AlternateContent xmlns:mc="http://schemas.openxmlformats.org/markup-compatibility/2006" xmlns:p14="http://schemas.microsoft.com/office/powerpoint/2010/main">
+    <mc:Choice Requires="p14">
       <p:transition spd="slow" p14:dur="2000" advTm="529229"/>
     </mc:Choice>
-    <mc:Fallback>
+    <mc:Fallback xmlns="">
       <p:transition spd="slow" advTm="529229"/>
     </mc:Fallback>
   </mc:AlternateContent>
@@ -3148,7 +3140,7 @@
 </file>
 
 <file path=ppt/slides/slide2.xml><?xml version="1.0" encoding="utf-8"?>
-<p:sld xmlns:a="http://schemas.openxmlformats.org/drawingml/2006/main" xmlns:r="http://schemas.openxmlformats.org/officeDocument/2006/relationships" xmlns:p="http://schemas.openxmlformats.org/presentationml/2006/main" show="0">
+<p:sld xmlns:a="http://schemas.openxmlformats.org/drawingml/2006/main" xmlns:r="http://schemas.openxmlformats.org/officeDocument/2006/relationships" xmlns:p="http://schemas.openxmlformats.org/presentationml/2006/main">
   <p:cSld>
     <p:spTree>
       <p:nvGrpSpPr>
@@ -3242,11 +3234,11 @@
   <p:clrMapOvr>
     <a:masterClrMapping/>
   </p:clrMapOvr>
-  <mc:AlternateContent xmlns:mc="http://schemas.openxmlformats.org/markup-compatibility/2006">
-    <mc:Choice xmlns:p14="http://schemas.microsoft.com/office/powerpoint/2010/main" Requires="p14">
+  <mc:AlternateContent xmlns:mc="http://schemas.openxmlformats.org/markup-compatibility/2006" xmlns:p14="http://schemas.microsoft.com/office/powerpoint/2010/main">
+    <mc:Choice Requires="p14">
       <p:transition spd="slow" p14:dur="2000" advTm="38148"/>
     </mc:Choice>
-    <mc:Fallback>
+    <mc:Fallback xmlns="">
       <p:transition spd="slow" advTm="38148"/>
     </mc:Fallback>
   </mc:AlternateContent>
@@ -3299,11 +3291,11 @@
   <p:clrMapOvr>
     <a:masterClrMapping/>
   </p:clrMapOvr>
-  <mc:AlternateContent xmlns:mc="http://schemas.openxmlformats.org/markup-compatibility/2006">
-    <mc:Choice xmlns:p14="http://schemas.microsoft.com/office/powerpoint/2010/main" Requires="p14">
+  <mc:AlternateContent xmlns:mc="http://schemas.openxmlformats.org/markup-compatibility/2006" xmlns:p14="http://schemas.microsoft.com/office/powerpoint/2010/main">
+    <mc:Choice Requires="p14">
       <p:transition spd="slow" p14:dur="2000" advTm="51801"/>
     </mc:Choice>
-    <mc:Fallback>
+    <mc:Fallback xmlns="">
       <p:transition spd="slow" advTm="51801"/>
     </mc:Fallback>
   </mc:AlternateContent>
